--- a/material/[SeSAC_YDP_6] 02_HTML.pptx
+++ b/material/[SeSAC_YDP_6] 02_HTML.pptx
@@ -9,7 +9,7 @@
     <p:notesMasterId r:id="rId65"/>
   </p:notesMasterIdLst>
   <p:sldIdLst>
-    <p:sldId id="256" r:id="rId3"/>
+    <p:sldId id="675" r:id="rId3"/>
     <p:sldId id="570" r:id="rId4"/>
     <p:sldId id="268" r:id="rId5"/>
     <p:sldId id="557" r:id="rId6"/>
@@ -603,7 +603,7 @@
     </p:spTree>
     <p:extLst>
       <p:ext uri="{BB962C8B-B14F-4D97-AF65-F5344CB8AC3E}">
-        <p14:creationId xmlns:p14="http://schemas.microsoft.com/office/powerpoint/2010/main" val="1761842308"/>
+        <p14:creationId xmlns:p14="http://schemas.microsoft.com/office/powerpoint/2010/main" val="4075598355"/>
       </p:ext>
     </p:extLst>
   </p:cSld>
@@ -10747,7 +10747,7 @@
       </p:grpSpPr>
       <p:sp>
         <p:nvSpPr>
-          <p:cNvPr id="7" name="제목 6"/>
+          <p:cNvPr id="2" name="제목 1"/>
           <p:cNvSpPr>
             <a:spLocks noGrp="1"/>
           </p:cNvSpPr>
@@ -10769,7 +10769,7 @@
       </p:sp>
       <p:sp>
         <p:nvSpPr>
-          <p:cNvPr id="8" name="부제목 7"/>
+          <p:cNvPr id="3" name="부제목 2"/>
           <p:cNvSpPr>
             <a:spLocks noGrp="1"/>
           </p:cNvSpPr>
@@ -10783,16 +10783,8 @@
           <a:lstStyle/>
           <a:p>
             <a:r>
-              <a:rPr lang="en-US" altLang="ko-KR" sz="2800" dirty="0" err="1"/>
-              <a:t>SeSAC</a:t>
-            </a:r>
-            <a:r>
-              <a:rPr lang="en-US" altLang="ko-KR" sz="2800" dirty="0"/>
-              <a:t> x </a:t>
-            </a:r>
-            <a:r>
-              <a:rPr lang="en-US" altLang="ko-KR" sz="2800" dirty="0" err="1"/>
-              <a:t>CODINGOn</a:t>
+              <a:rPr lang="en-US" altLang="ko-KR" dirty="0" err="1"/>
+              <a:t>CodingOn</a:t>
             </a:r>
             <a:endParaRPr lang="ko-KR" altLang="en-US" dirty="0"/>
           </a:p>
@@ -10800,13 +10792,7 @@
       </p:sp>
       <p:sp>
         <p:nvSpPr>
-          <p:cNvPr id="4" name="날짜 개체 틀 3">
-            <a:extLst>
-              <a:ext uri="{FF2B5EF4-FFF2-40B4-BE49-F238E27FC236}">
-                <a16:creationId xmlns:a16="http://schemas.microsoft.com/office/drawing/2014/main" id="{20223B3B-2FCF-58AF-BC81-E9824EB6B19E}"/>
-              </a:ext>
-            </a:extLst>
-          </p:cNvPr>
+          <p:cNvPr id="4" name="날짜 개체 틀 3"/>
           <p:cNvSpPr>
             <a:spLocks noGrp="1"/>
           </p:cNvSpPr>
@@ -10819,23 +10805,17 @@
           <a:bodyPr/>
           <a:lstStyle/>
           <a:p>
-            <a:fld id="{4DA02FB7-A3D0-4BF4-B23F-90A4C3B73A56}" type="datetime6">
+            <a:fld id="{0E19CB95-6D28-40F1-9DA3-1BAC5D4B5B4F}" type="datetime6">
               <a:rPr lang="ko-KR" altLang="en-US" smtClean="0"/>
               <a:t>2024년 5월</a:t>
             </a:fld>
-            <a:endParaRPr lang="ko-KR" altLang="en-US" dirty="0"/>
-          </a:p>
-        </p:txBody>
-      </p:sp>
-      <p:sp>
-        <p:nvSpPr>
-          <p:cNvPr id="6" name="슬라이드 번호 개체 틀 5">
-            <a:extLst>
-              <a:ext uri="{FF2B5EF4-FFF2-40B4-BE49-F238E27FC236}">
-                <a16:creationId xmlns:a16="http://schemas.microsoft.com/office/drawing/2014/main" id="{AC7112DC-52CD-A148-06F6-6813E1A67427}"/>
-              </a:ext>
-            </a:extLst>
-          </p:cNvPr>
+            <a:endParaRPr lang="ko-KR" altLang="en-US"/>
+          </a:p>
+        </p:txBody>
+      </p:sp>
+      <p:sp>
+        <p:nvSpPr>
+          <p:cNvPr id="5" name="슬라이드 번호 개체 틀 4"/>
           <p:cNvSpPr>
             <a:spLocks noGrp="1"/>
           </p:cNvSpPr>
@@ -10859,7 +10839,7 @@
     </p:spTree>
     <p:extLst>
       <p:ext uri="{BB962C8B-B14F-4D97-AF65-F5344CB8AC3E}">
-        <p14:creationId xmlns:p14="http://schemas.microsoft.com/office/powerpoint/2010/main" val="1611655305"/>
+        <p14:creationId xmlns:p14="http://schemas.microsoft.com/office/powerpoint/2010/main" val="2183790230"/>
       </p:ext>
     </p:extLst>
   </p:cSld>

--- a/material/[SeSAC_YDP_6] 02_HTML.pptx
+++ b/material/[SeSAC_YDP_6] 02_HTML.pptx
@@ -263,7 +263,7 @@
           <a:p>
             <a:fld id="{2EF3F159-7250-4DD4-91C2-13B35D56E1AF}" type="datetimeFigureOut">
               <a:rPr lang="ko-KR" altLang="en-US" smtClean="0"/>
-              <a:t>2024-05-16</a:t>
+              <a:t>2024-11-17</a:t>
             </a:fld>
             <a:endParaRPr lang="ko-KR" altLang="en-US"/>
           </a:p>
@@ -2213,14 +2213,7 @@
           <a:bodyPr/>
           <a:lstStyle/>
           <a:p>
-            <a:r>
-              <a:rPr lang="en-US" altLang="ko-KR" dirty="0"/>
-              <a:t>name</a:t>
-            </a:r>
-            <a:r>
-              <a:rPr lang="ko-KR" altLang="en-US" dirty="0"/>
-              <a:t>이라는 속성으로 하나의 그룹으로 묶는 것</a:t>
-            </a:r>
+            <a:endParaRPr lang="ko-KR" altLang="en-US" dirty="0"/>
           </a:p>
         </p:txBody>
       </p:sp>
@@ -2239,19 +2232,18 @@
           <a:bodyPr/>
           <a:lstStyle/>
           <a:p>
-            <a:fld id="{4BFBE08D-718C-43A8-8B26-A1EE2A797DD6}" type="slidenum">
+            <a:fld id="{C09E5BFC-1559-42F1-8940-AB342D56BF02}" type="slidenum">
               <a:rPr lang="ko-KR" altLang="en-US" smtClean="0"/>
-              <a:pPr/>
-              <a:t>39</a:t>
+              <a:t>38</a:t>
             </a:fld>
-            <a:endParaRPr lang="ko-KR" altLang="en-US" dirty="0"/>
+            <a:endParaRPr lang="ko-KR" altLang="en-US"/>
           </a:p>
         </p:txBody>
       </p:sp>
     </p:spTree>
     <p:extLst>
       <p:ext uri="{BB962C8B-B14F-4D97-AF65-F5344CB8AC3E}">
-        <p14:creationId xmlns:p14="http://schemas.microsoft.com/office/powerpoint/2010/main" val="1490628307"/>
+        <p14:creationId xmlns:p14="http://schemas.microsoft.com/office/powerpoint/2010/main" val="3671777249"/>
       </p:ext>
     </p:extLst>
   </p:cSld>
@@ -2305,7 +2297,14 @@
           <a:bodyPr/>
           <a:lstStyle/>
           <a:p>
-            <a:endParaRPr lang="ko-KR" altLang="en-US" dirty="0"/>
+            <a:r>
+              <a:rPr lang="en-US" altLang="ko-KR" dirty="0"/>
+              <a:t>name</a:t>
+            </a:r>
+            <a:r>
+              <a:rPr lang="ko-KR" altLang="en-US" dirty="0"/>
+              <a:t>이라는 속성으로 하나의 그룹으로 묶는 것</a:t>
+            </a:r>
           </a:p>
         </p:txBody>
       </p:sp>
@@ -2326,16 +2325,17 @@
           <a:p>
             <a:fld id="{4BFBE08D-718C-43A8-8B26-A1EE2A797DD6}" type="slidenum">
               <a:rPr lang="ko-KR" altLang="en-US" smtClean="0"/>
-              <a:t>40</a:t>
+              <a:pPr/>
+              <a:t>39</a:t>
             </a:fld>
-            <a:endParaRPr lang="ko-KR" altLang="en-US"/>
+            <a:endParaRPr lang="ko-KR" altLang="en-US" dirty="0"/>
           </a:p>
         </p:txBody>
       </p:sp>
     </p:spTree>
     <p:extLst>
       <p:ext uri="{BB962C8B-B14F-4D97-AF65-F5344CB8AC3E}">
-        <p14:creationId xmlns:p14="http://schemas.microsoft.com/office/powerpoint/2010/main" val="1974742282"/>
+        <p14:creationId xmlns:p14="http://schemas.microsoft.com/office/powerpoint/2010/main" val="1490628307"/>
       </p:ext>
     </p:extLst>
   </p:cSld>
@@ -2408,9 +2408,9 @@
           <a:bodyPr/>
           <a:lstStyle/>
           <a:p>
-            <a:fld id="{C09E5BFC-1559-42F1-8940-AB342D56BF02}" type="slidenum">
+            <a:fld id="{4BFBE08D-718C-43A8-8B26-A1EE2A797DD6}" type="slidenum">
               <a:rPr lang="ko-KR" altLang="en-US" smtClean="0"/>
-              <a:t>41</a:t>
+              <a:t>40</a:t>
             </a:fld>
             <a:endParaRPr lang="ko-KR" altLang="en-US"/>
           </a:p>
@@ -2419,7 +2419,7 @@
     </p:spTree>
     <p:extLst>
       <p:ext uri="{BB962C8B-B14F-4D97-AF65-F5344CB8AC3E}">
-        <p14:creationId xmlns:p14="http://schemas.microsoft.com/office/powerpoint/2010/main" val="4182015863"/>
+        <p14:creationId xmlns:p14="http://schemas.microsoft.com/office/powerpoint/2010/main" val="1974742282"/>
       </p:ext>
     </p:extLst>
   </p:cSld>
@@ -2484,7 +2484,7 @@
             <a:spLocks noGrp="1"/>
           </p:cNvSpPr>
           <p:nvPr>
-            <p:ph type="sldNum" sz="quarter" idx="5"/>
+            <p:ph type="sldNum" sz="quarter" idx="10"/>
           </p:nvPr>
         </p:nvSpPr>
         <p:spPr/>
@@ -2494,7 +2494,7 @@
           <a:p>
             <a:fld id="{C09E5BFC-1559-42F1-8940-AB342D56BF02}" type="slidenum">
               <a:rPr lang="ko-KR" altLang="en-US" smtClean="0"/>
-              <a:t>42</a:t>
+              <a:t>41</a:t>
             </a:fld>
             <a:endParaRPr lang="ko-KR" altLang="en-US"/>
           </a:p>
@@ -2503,7 +2503,7 @@
     </p:spTree>
     <p:extLst>
       <p:ext uri="{BB962C8B-B14F-4D97-AF65-F5344CB8AC3E}">
-        <p14:creationId xmlns:p14="http://schemas.microsoft.com/office/powerpoint/2010/main" val="1534781889"/>
+        <p14:creationId xmlns:p14="http://schemas.microsoft.com/office/powerpoint/2010/main" val="4182015863"/>
       </p:ext>
     </p:extLst>
   </p:cSld>
@@ -2622,6 +2622,10 @@
             <a:r>
               <a:rPr lang="ko-KR" altLang="en-US" dirty="0"/>
               <a:t>동사</a:t>
+            </a:r>
+            <a:r>
+              <a:rPr lang="en-US" altLang="ko-KR" dirty="0"/>
+              <a:t/>
             </a:r>
             <a:br>
               <a:rPr lang="en-US" altLang="ko-KR" dirty="0"/>
@@ -2724,17 +2728,17 @@
             <a:spLocks noGrp="1"/>
           </p:cNvSpPr>
           <p:nvPr>
-            <p:ph type="sldNum" sz="quarter" idx="10"/>
-          </p:nvPr>
-        </p:nvSpPr>
-        <p:spPr/>
-        <p:txBody>
-          <a:bodyPr/>
-          <a:lstStyle/>
-          <a:p>
-            <a:fld id="{4BFBE08D-718C-43A8-8B26-A1EE2A797DD6}" type="slidenum">
+            <p:ph type="sldNum" sz="quarter" idx="5"/>
+          </p:nvPr>
+        </p:nvSpPr>
+        <p:spPr/>
+        <p:txBody>
+          <a:bodyPr/>
+          <a:lstStyle/>
+          <a:p>
+            <a:fld id="{C09E5BFC-1559-42F1-8940-AB342D56BF02}" type="slidenum">
               <a:rPr lang="ko-KR" altLang="en-US" smtClean="0"/>
-              <a:t>47</a:t>
+              <a:t>42</a:t>
             </a:fld>
             <a:endParaRPr lang="ko-KR" altLang="en-US"/>
           </a:p>
@@ -2743,7 +2747,7 @@
     </p:spTree>
     <p:extLst>
       <p:ext uri="{BB962C8B-B14F-4D97-AF65-F5344CB8AC3E}">
-        <p14:creationId xmlns:p14="http://schemas.microsoft.com/office/powerpoint/2010/main" val="2980031437"/>
+        <p14:creationId xmlns:p14="http://schemas.microsoft.com/office/powerpoint/2010/main" val="1534781889"/>
       </p:ext>
     </p:extLst>
   </p:cSld>
@@ -2808,17 +2812,17 @@
             <a:spLocks noGrp="1"/>
           </p:cNvSpPr>
           <p:nvPr>
-            <p:ph type="sldNum" sz="quarter" idx="5"/>
-          </p:nvPr>
-        </p:nvSpPr>
-        <p:spPr/>
-        <p:txBody>
-          <a:bodyPr/>
-          <a:lstStyle/>
-          <a:p>
-            <a:fld id="{C09E5BFC-1559-42F1-8940-AB342D56BF02}" type="slidenum">
+            <p:ph type="sldNum" sz="quarter" idx="10"/>
+          </p:nvPr>
+        </p:nvSpPr>
+        <p:spPr/>
+        <p:txBody>
+          <a:bodyPr/>
+          <a:lstStyle/>
+          <a:p>
+            <a:fld id="{4BFBE08D-718C-43A8-8B26-A1EE2A797DD6}" type="slidenum">
               <a:rPr lang="ko-KR" altLang="en-US" smtClean="0"/>
-              <a:t>49</a:t>
+              <a:t>47</a:t>
             </a:fld>
             <a:endParaRPr lang="ko-KR" altLang="en-US"/>
           </a:p>
@@ -2827,7 +2831,7 @@
     </p:spTree>
     <p:extLst>
       <p:ext uri="{BB962C8B-B14F-4D97-AF65-F5344CB8AC3E}">
-        <p14:creationId xmlns:p14="http://schemas.microsoft.com/office/powerpoint/2010/main" val="573091543"/>
+        <p14:creationId xmlns:p14="http://schemas.microsoft.com/office/powerpoint/2010/main" val="2980031437"/>
       </p:ext>
     </p:extLst>
   </p:cSld>
@@ -2902,7 +2906,7 @@
           <a:p>
             <a:fld id="{C09E5BFC-1559-42F1-8940-AB342D56BF02}" type="slidenum">
               <a:rPr lang="ko-KR" altLang="en-US" smtClean="0"/>
-              <a:t>50</a:t>
+              <a:t>49</a:t>
             </a:fld>
             <a:endParaRPr lang="ko-KR" altLang="en-US"/>
           </a:p>
@@ -2911,7 +2915,7 @@
     </p:spTree>
     <p:extLst>
       <p:ext uri="{BB962C8B-B14F-4D97-AF65-F5344CB8AC3E}">
-        <p14:creationId xmlns:p14="http://schemas.microsoft.com/office/powerpoint/2010/main" val="2905298523"/>
+        <p14:creationId xmlns:p14="http://schemas.microsoft.com/office/powerpoint/2010/main" val="573091543"/>
       </p:ext>
     </p:extLst>
   </p:cSld>
@@ -2986,7 +2990,7 @@
           <a:p>
             <a:fld id="{C09E5BFC-1559-42F1-8940-AB342D56BF02}" type="slidenum">
               <a:rPr lang="ko-KR" altLang="en-US" smtClean="0"/>
-              <a:t>56</a:t>
+              <a:t>50</a:t>
             </a:fld>
             <a:endParaRPr lang="ko-KR" altLang="en-US"/>
           </a:p>
@@ -2995,7 +2999,7 @@
     </p:spTree>
     <p:extLst>
       <p:ext uri="{BB962C8B-B14F-4D97-AF65-F5344CB8AC3E}">
-        <p14:creationId xmlns:p14="http://schemas.microsoft.com/office/powerpoint/2010/main" val="4069035363"/>
+        <p14:creationId xmlns:p14="http://schemas.microsoft.com/office/powerpoint/2010/main" val="2905298523"/>
       </p:ext>
     </p:extLst>
   </p:cSld>
@@ -3070,7 +3074,7 @@
           <a:p>
             <a:fld id="{C09E5BFC-1559-42F1-8940-AB342D56BF02}" type="slidenum">
               <a:rPr lang="ko-KR" altLang="en-US" smtClean="0"/>
-              <a:t>57</a:t>
+              <a:t>56</a:t>
             </a:fld>
             <a:endParaRPr lang="ko-KR" altLang="en-US"/>
           </a:p>
@@ -3079,7 +3083,7 @@
     </p:spTree>
     <p:extLst>
       <p:ext uri="{BB962C8B-B14F-4D97-AF65-F5344CB8AC3E}">
-        <p14:creationId xmlns:p14="http://schemas.microsoft.com/office/powerpoint/2010/main" val="2644692472"/>
+        <p14:creationId xmlns:p14="http://schemas.microsoft.com/office/powerpoint/2010/main" val="4069035363"/>
       </p:ext>
     </p:extLst>
   </p:cSld>
@@ -3154,7 +3158,7 @@
           <a:p>
             <a:fld id="{C09E5BFC-1559-42F1-8940-AB342D56BF02}" type="slidenum">
               <a:rPr lang="ko-KR" altLang="en-US" smtClean="0"/>
-              <a:t>58</a:t>
+              <a:t>57</a:t>
             </a:fld>
             <a:endParaRPr lang="ko-KR" altLang="en-US"/>
           </a:p>
@@ -3163,7 +3167,7 @@
     </p:spTree>
     <p:extLst>
       <p:ext uri="{BB962C8B-B14F-4D97-AF65-F5344CB8AC3E}">
-        <p14:creationId xmlns:p14="http://schemas.microsoft.com/office/powerpoint/2010/main" val="1945011512"/>
+        <p14:creationId xmlns:p14="http://schemas.microsoft.com/office/powerpoint/2010/main" val="2644692472"/>
       </p:ext>
     </p:extLst>
   </p:cSld>
@@ -3238,7 +3242,7 @@
           <a:p>
             <a:fld id="{C09E5BFC-1559-42F1-8940-AB342D56BF02}" type="slidenum">
               <a:rPr lang="ko-KR" altLang="en-US" smtClean="0"/>
-              <a:t>59</a:t>
+              <a:t>58</a:t>
             </a:fld>
             <a:endParaRPr lang="ko-KR" altLang="en-US"/>
           </a:p>
@@ -3247,7 +3251,7 @@
     </p:spTree>
     <p:extLst>
       <p:ext uri="{BB962C8B-B14F-4D97-AF65-F5344CB8AC3E}">
-        <p14:creationId xmlns:p14="http://schemas.microsoft.com/office/powerpoint/2010/main" val="694626296"/>
+        <p14:creationId xmlns:p14="http://schemas.microsoft.com/office/powerpoint/2010/main" val="1945011512"/>
       </p:ext>
     </p:extLst>
   </p:cSld>
@@ -3322,7 +3326,7 @@
           <a:p>
             <a:fld id="{C09E5BFC-1559-42F1-8940-AB342D56BF02}" type="slidenum">
               <a:rPr lang="ko-KR" altLang="en-US" smtClean="0"/>
-              <a:t>60</a:t>
+              <a:t>59</a:t>
             </a:fld>
             <a:endParaRPr lang="ko-KR" altLang="en-US"/>
           </a:p>
@@ -3331,7 +3335,7 @@
     </p:spTree>
     <p:extLst>
       <p:ext uri="{BB962C8B-B14F-4D97-AF65-F5344CB8AC3E}">
-        <p14:creationId xmlns:p14="http://schemas.microsoft.com/office/powerpoint/2010/main" val="1949405708"/>
+        <p14:creationId xmlns:p14="http://schemas.microsoft.com/office/powerpoint/2010/main" val="694626296"/>
       </p:ext>
     </p:extLst>
   </p:cSld>
@@ -3406,7 +3410,7 @@
           <a:p>
             <a:fld id="{C09E5BFC-1559-42F1-8940-AB342D56BF02}" type="slidenum">
               <a:rPr lang="ko-KR" altLang="en-US" smtClean="0"/>
-              <a:t>61</a:t>
+              <a:t>60</a:t>
             </a:fld>
             <a:endParaRPr lang="ko-KR" altLang="en-US"/>
           </a:p>
@@ -3415,7 +3419,7 @@
     </p:spTree>
     <p:extLst>
       <p:ext uri="{BB962C8B-B14F-4D97-AF65-F5344CB8AC3E}">
-        <p14:creationId xmlns:p14="http://schemas.microsoft.com/office/powerpoint/2010/main" val="4190997138"/>
+        <p14:creationId xmlns:p14="http://schemas.microsoft.com/office/powerpoint/2010/main" val="1949405708"/>
       </p:ext>
     </p:extLst>
   </p:cSld>
@@ -3490,7 +3494,7 @@
           <a:p>
             <a:fld id="{C09E5BFC-1559-42F1-8940-AB342D56BF02}" type="slidenum">
               <a:rPr lang="ko-KR" altLang="en-US" smtClean="0"/>
-              <a:t>62</a:t>
+              <a:t>61</a:t>
             </a:fld>
             <a:endParaRPr lang="ko-KR" altLang="en-US"/>
           </a:p>
@@ -3499,7 +3503,7 @@
     </p:spTree>
     <p:extLst>
       <p:ext uri="{BB962C8B-B14F-4D97-AF65-F5344CB8AC3E}">
-        <p14:creationId xmlns:p14="http://schemas.microsoft.com/office/powerpoint/2010/main" val="2252954961"/>
+        <p14:creationId xmlns:p14="http://schemas.microsoft.com/office/powerpoint/2010/main" val="4190997138"/>
       </p:ext>
     </p:extLst>
   </p:cSld>
@@ -3594,6 +3598,90 @@
 </file>
 
 <file path=ppt/notesSlides/notesSlide40.xml><?xml version="1.0" encoding="utf-8"?>
+<p:notes xmlns:a="http://schemas.openxmlformats.org/drawingml/2006/main" xmlns:r="http://schemas.openxmlformats.org/officeDocument/2006/relationships" xmlns:p="http://schemas.openxmlformats.org/presentationml/2006/main">
+  <p:cSld>
+    <p:spTree>
+      <p:nvGrpSpPr>
+        <p:cNvPr id="1" name=""/>
+        <p:cNvGrpSpPr/>
+        <p:nvPr/>
+      </p:nvGrpSpPr>
+      <p:grpSpPr>
+        <a:xfrm>
+          <a:off x="0" y="0"/>
+          <a:ext cx="0" cy="0"/>
+          <a:chOff x="0" y="0"/>
+          <a:chExt cx="0" cy="0"/>
+        </a:xfrm>
+      </p:grpSpPr>
+      <p:sp>
+        <p:nvSpPr>
+          <p:cNvPr id="2" name="슬라이드 이미지 개체 틀 1"/>
+          <p:cNvSpPr>
+            <a:spLocks noGrp="1" noRot="1" noChangeAspect="1"/>
+          </p:cNvSpPr>
+          <p:nvPr>
+            <p:ph type="sldImg"/>
+          </p:nvPr>
+        </p:nvSpPr>
+        <p:spPr/>
+      </p:sp>
+      <p:sp>
+        <p:nvSpPr>
+          <p:cNvPr id="3" name="슬라이드 노트 개체 틀 2"/>
+          <p:cNvSpPr>
+            <a:spLocks noGrp="1"/>
+          </p:cNvSpPr>
+          <p:nvPr>
+            <p:ph type="body" idx="1"/>
+          </p:nvPr>
+        </p:nvSpPr>
+        <p:spPr/>
+        <p:txBody>
+          <a:bodyPr/>
+          <a:lstStyle/>
+          <a:p>
+            <a:endParaRPr lang="ko-KR" altLang="en-US" dirty="0"/>
+          </a:p>
+        </p:txBody>
+      </p:sp>
+      <p:sp>
+        <p:nvSpPr>
+          <p:cNvPr id="4" name="슬라이드 번호 개체 틀 3"/>
+          <p:cNvSpPr>
+            <a:spLocks noGrp="1"/>
+          </p:cNvSpPr>
+          <p:nvPr>
+            <p:ph type="sldNum" sz="quarter" idx="5"/>
+          </p:nvPr>
+        </p:nvSpPr>
+        <p:spPr/>
+        <p:txBody>
+          <a:bodyPr/>
+          <a:lstStyle/>
+          <a:p>
+            <a:fld id="{C09E5BFC-1559-42F1-8940-AB342D56BF02}" type="slidenum">
+              <a:rPr lang="ko-KR" altLang="en-US" smtClean="0"/>
+              <a:t>62</a:t>
+            </a:fld>
+            <a:endParaRPr lang="ko-KR" altLang="en-US"/>
+          </a:p>
+        </p:txBody>
+      </p:sp>
+    </p:spTree>
+    <p:extLst>
+      <p:ext uri="{BB962C8B-B14F-4D97-AF65-F5344CB8AC3E}">
+        <p14:creationId xmlns:p14="http://schemas.microsoft.com/office/powerpoint/2010/main" val="2252954961"/>
+      </p:ext>
+    </p:extLst>
+  </p:cSld>
+  <p:clrMapOvr>
+    <a:masterClrMapping/>
+  </p:clrMapOvr>
+</p:notes>
+</file>
+
+<file path=ppt/notesSlides/notesSlide41.xml><?xml version="1.0" encoding="utf-8"?>
 <p:notes xmlns:a="http://schemas.openxmlformats.org/drawingml/2006/main" xmlns:r="http://schemas.openxmlformats.org/officeDocument/2006/relationships" xmlns:p="http://schemas.openxmlformats.org/presentationml/2006/main">
   <p:cSld>
     <p:spTree>
@@ -4315,7 +4403,7 @@
           <a:p>
             <a:fld id="{0E19CB95-6D28-40F1-9DA3-1BAC5D4B5B4F}" type="datetime6">
               <a:rPr lang="ko-KR" altLang="en-US" smtClean="0"/>
-              <a:t>2024년 5월</a:t>
+              <a:t>2024년 11월</a:t>
             </a:fld>
             <a:endParaRPr lang="ko-KR" altLang="en-US"/>
           </a:p>
@@ -4445,7 +4533,7 @@
           <p:nvPr userDrawn="1"/>
         </p:nvPicPr>
         <p:blipFill>
-          <a:blip r:embed="rId2">
+          <a:blip r:embed="rId2" cstate="hqprint">
             <a:alphaModFix amt="20000"/>
             <a:extLst>
               <a:ext uri="{28A0092B-C50C-407E-A947-70E740481C1C}">
@@ -4695,7 +4783,7 @@
           <a:p>
             <a:fld id="{C4A39A32-5728-48B8-9F9C-437D214CCAF1}" type="datetime6">
               <a:rPr lang="ko-KR" altLang="en-US" smtClean="0"/>
-              <a:t>2024년 5월</a:t>
+              <a:t>2024년 11월</a:t>
             </a:fld>
             <a:endParaRPr lang="ko-KR" altLang="en-US"/>
           </a:p>
@@ -4897,7 +4985,7 @@
           <a:p>
             <a:fld id="{3BECC8BA-EBCB-4BF9-8E87-970CE0138376}" type="datetime6">
               <a:rPr lang="ko-KR" altLang="en-US" smtClean="0"/>
-              <a:t>2024년 5월</a:t>
+              <a:t>2024년 11월</a:t>
             </a:fld>
             <a:endParaRPr lang="ko-KR" altLang="en-US"/>
           </a:p>
@@ -5105,7 +5193,7 @@
           <a:p>
             <a:fld id="{7869FA6E-4699-4AC6-B2CB-4E60A58ED7A8}" type="datetime6">
               <a:rPr lang="ko-KR" altLang="en-US" smtClean="0"/>
-              <a:t>2024년 5월</a:t>
+              <a:t>2024년 11월</a:t>
             </a:fld>
             <a:endParaRPr lang="ko-KR" altLang="en-US"/>
           </a:p>
@@ -5325,7 +5413,7 @@
           <a:p>
             <a:fld id="{1EE31C3C-9957-41B2-9EF9-BC9D69040AAB}" type="datetimeFigureOut">
               <a:rPr lang="ko-KR" altLang="en-US" smtClean="0"/>
-              <a:t>2024-05-16</a:t>
+              <a:t>2024-11-17</a:t>
             </a:fld>
             <a:endParaRPr lang="ko-KR" altLang="en-US"/>
           </a:p>
@@ -5523,7 +5611,7 @@
           <a:p>
             <a:fld id="{1EE31C3C-9957-41B2-9EF9-BC9D69040AAB}" type="datetimeFigureOut">
               <a:rPr lang="ko-KR" altLang="en-US" smtClean="0"/>
-              <a:t>2024-05-16</a:t>
+              <a:t>2024-11-17</a:t>
             </a:fld>
             <a:endParaRPr lang="ko-KR" altLang="en-US"/>
           </a:p>
@@ -5798,7 +5886,7 @@
           <a:p>
             <a:fld id="{1EE31C3C-9957-41B2-9EF9-BC9D69040AAB}" type="datetimeFigureOut">
               <a:rPr lang="ko-KR" altLang="en-US" smtClean="0"/>
-              <a:t>2024-05-16</a:t>
+              <a:t>2024-11-17</a:t>
             </a:fld>
             <a:endParaRPr lang="ko-KR" altLang="en-US"/>
           </a:p>
@@ -6063,7 +6151,7 @@
           <a:p>
             <a:fld id="{1EE31C3C-9957-41B2-9EF9-BC9D69040AAB}" type="datetimeFigureOut">
               <a:rPr lang="ko-KR" altLang="en-US" smtClean="0"/>
-              <a:t>2024-05-16</a:t>
+              <a:t>2024-11-17</a:t>
             </a:fld>
             <a:endParaRPr lang="ko-KR" altLang="en-US"/>
           </a:p>
@@ -6475,7 +6563,7 @@
           <a:p>
             <a:fld id="{1EE31C3C-9957-41B2-9EF9-BC9D69040AAB}" type="datetimeFigureOut">
               <a:rPr lang="ko-KR" altLang="en-US" smtClean="0"/>
-              <a:t>2024-05-16</a:t>
+              <a:t>2024-11-17</a:t>
             </a:fld>
             <a:endParaRPr lang="ko-KR" altLang="en-US"/>
           </a:p>
@@ -6616,7 +6704,7 @@
           <a:p>
             <a:fld id="{1EE31C3C-9957-41B2-9EF9-BC9D69040AAB}" type="datetimeFigureOut">
               <a:rPr lang="ko-KR" altLang="en-US" smtClean="0"/>
-              <a:t>2024-05-16</a:t>
+              <a:t>2024-11-17</a:t>
             </a:fld>
             <a:endParaRPr lang="ko-KR" altLang="en-US"/>
           </a:p>
@@ -6729,7 +6817,7 @@
           <a:p>
             <a:fld id="{1EE31C3C-9957-41B2-9EF9-BC9D69040AAB}" type="datetimeFigureOut">
               <a:rPr lang="ko-KR" altLang="en-US" smtClean="0"/>
-              <a:t>2024-05-16</a:t>
+              <a:t>2024-11-17</a:t>
             </a:fld>
             <a:endParaRPr lang="ko-KR" altLang="en-US"/>
           </a:p>
@@ -6842,7 +6930,7 @@
           <a:p>
             <a:fld id="{0E19CB95-6D28-40F1-9DA3-1BAC5D4B5B4F}" type="datetime6">
               <a:rPr lang="ko-KR" altLang="en-US" smtClean="0"/>
-              <a:t>2024년 5월</a:t>
+              <a:t>2024년 11월</a:t>
             </a:fld>
             <a:endParaRPr lang="ko-KR" altLang="en-US"/>
           </a:p>
@@ -7245,7 +7333,7 @@
           <a:p>
             <a:fld id="{1EE31C3C-9957-41B2-9EF9-BC9D69040AAB}" type="datetimeFigureOut">
               <a:rPr lang="ko-KR" altLang="en-US" smtClean="0"/>
-              <a:t>2024-05-16</a:t>
+              <a:t>2024-11-17</a:t>
             </a:fld>
             <a:endParaRPr lang="ko-KR" altLang="en-US"/>
           </a:p>
@@ -7533,7 +7621,7 @@
           <a:p>
             <a:fld id="{1EE31C3C-9957-41B2-9EF9-BC9D69040AAB}" type="datetimeFigureOut">
               <a:rPr lang="ko-KR" altLang="en-US" smtClean="0"/>
-              <a:t>2024-05-16</a:t>
+              <a:t>2024-11-17</a:t>
             </a:fld>
             <a:endParaRPr lang="ko-KR" altLang="en-US"/>
           </a:p>
@@ -7731,7 +7819,7 @@
           <a:p>
             <a:fld id="{1EE31C3C-9957-41B2-9EF9-BC9D69040AAB}" type="datetimeFigureOut">
               <a:rPr lang="ko-KR" altLang="en-US" smtClean="0"/>
-              <a:t>2024-05-16</a:t>
+              <a:t>2024-11-17</a:t>
             </a:fld>
             <a:endParaRPr lang="ko-KR" altLang="en-US"/>
           </a:p>
@@ -7939,7 +8027,7 @@
           <a:p>
             <a:fld id="{1EE31C3C-9957-41B2-9EF9-BC9D69040AAB}" type="datetimeFigureOut">
               <a:rPr lang="ko-KR" altLang="en-US" smtClean="0"/>
-              <a:t>2024-05-16</a:t>
+              <a:t>2024-11-17</a:t>
             </a:fld>
             <a:endParaRPr lang="ko-KR" altLang="en-US"/>
           </a:p>
@@ -8109,7 +8197,7 @@
           <a:p>
             <a:fld id="{3C9CE3CE-253F-4F9D-BA15-C226C8D8501E}" type="datetime6">
               <a:rPr lang="ko-KR" altLang="en-US" smtClean="0"/>
-              <a:t>2024년 5월</a:t>
+              <a:t>2024년 11월</a:t>
             </a:fld>
             <a:endParaRPr lang="ko-KR" altLang="en-US"/>
           </a:p>
@@ -8426,7 +8514,7 @@
           <a:p>
             <a:fld id="{BE5A7087-D460-46DD-B430-F8D9B9677D08}" type="datetime6">
               <a:rPr lang="ko-KR" altLang="en-US" smtClean="0"/>
-              <a:t>2024년 5월</a:t>
+              <a:t>2024년 11월</a:t>
             </a:fld>
             <a:endParaRPr lang="ko-KR" altLang="en-US"/>
           </a:p>
@@ -8695,7 +8783,7 @@
           <a:p>
             <a:fld id="{0581BA25-D675-4234-A003-8449BDEEF18E}" type="datetime6">
               <a:rPr lang="ko-KR" altLang="en-US" smtClean="0"/>
-              <a:t>2024년 5월</a:t>
+              <a:t>2024년 11월</a:t>
             </a:fld>
             <a:endParaRPr lang="ko-KR" altLang="en-US"/>
           </a:p>
@@ -9111,7 +9199,7 @@
           <a:p>
             <a:fld id="{26155C29-A87F-46F0-A24C-6C9F0A4BF6AA}" type="datetime6">
               <a:rPr lang="ko-KR" altLang="en-US" smtClean="0"/>
-              <a:t>2024년 5월</a:t>
+              <a:t>2024년 11월</a:t>
             </a:fld>
             <a:endParaRPr lang="ko-KR" altLang="en-US"/>
           </a:p>
@@ -9256,7 +9344,7 @@
           <a:p>
             <a:fld id="{DD2EDD62-8757-43DB-BAE0-460422B548EA}" type="datetime6">
               <a:rPr lang="ko-KR" altLang="en-US" smtClean="0"/>
-              <a:t>2024년 5월</a:t>
+              <a:t>2024년 11월</a:t>
             </a:fld>
             <a:endParaRPr lang="ko-KR" altLang="en-US"/>
           </a:p>
@@ -9369,7 +9457,7 @@
           <a:p>
             <a:fld id="{DC6A871B-4800-495F-AC75-93D44C7DEBA5}" type="datetime6">
               <a:rPr lang="ko-KR" altLang="en-US" smtClean="0"/>
-              <a:t>2024년 5월</a:t>
+              <a:t>2024년 11월</a:t>
             </a:fld>
             <a:endParaRPr lang="ko-KR" altLang="en-US"/>
           </a:p>
@@ -9680,7 +9768,7 @@
           <a:p>
             <a:fld id="{59605888-30A6-49BB-95E2-DEAE4E5B09E9}" type="datetime6">
               <a:rPr lang="ko-KR" altLang="en-US" smtClean="0"/>
-              <a:t>2024년 5월</a:t>
+              <a:t>2024년 11월</a:t>
             </a:fld>
             <a:endParaRPr lang="ko-KR" altLang="en-US"/>
           </a:p>
@@ -9921,7 +10009,7 @@
           <a:p>
             <a:fld id="{8691C14A-5735-4A8B-B68B-DEC1DC2A3813}" type="datetime6">
               <a:rPr lang="ko-KR" altLang="en-US" smtClean="0"/>
-              <a:t>2024년 5월</a:t>
+              <a:t>2024년 11월</a:t>
             </a:fld>
             <a:endParaRPr lang="ko-KR" altLang="en-US"/>
           </a:p>
@@ -10086,7 +10174,7 @@
           <p:nvPr userDrawn="1"/>
         </p:nvPicPr>
         <p:blipFill>
-          <a:blip r:embed="rId14">
+          <a:blip r:embed="rId14" cstate="hqprint">
             <a:extLst>
               <a:ext uri="{28A0092B-C50C-407E-A947-70E740481C1C}">
                 <a14:useLocalDpi xmlns:a14="http://schemas.microsoft.com/office/drawing/2010/main" val="0"/>
@@ -10581,7 +10669,7 @@
           <a:p>
             <a:fld id="{1EE31C3C-9957-41B2-9EF9-BC9D69040AAB}" type="datetimeFigureOut">
               <a:rPr lang="ko-KR" altLang="en-US" smtClean="0"/>
-              <a:t>2024-05-16</a:t>
+              <a:t>2024-11-17</a:t>
             </a:fld>
             <a:endParaRPr lang="ko-KR" altLang="en-US"/>
           </a:p>
@@ -11060,7 +11148,7 @@
           <a:p>
             <a:fld id="{0E19CB95-6D28-40F1-9DA3-1BAC5D4B5B4F}" type="datetime6">
               <a:rPr lang="ko-KR" altLang="en-US" smtClean="0"/>
-              <a:t>2024년 5월</a:t>
+              <a:t>2024년 11월</a:t>
             </a:fld>
             <a:endParaRPr lang="ko-KR" altLang="en-US"/>
           </a:p>
@@ -11138,7 +11226,7 @@
         <p:spPr/>
         <p:txBody>
           <a:bodyPr>
-            <a:normAutofit fontScale="92500" lnSpcReduction="10000"/>
+            <a:normAutofit fontScale="92500" lnSpcReduction="20000"/>
           </a:bodyPr>
           <a:lstStyle/>
           <a:p>
@@ -11413,7 +11501,7 @@
           <a:p>
             <a:fld id="{F84450A5-EEAC-4EB9-A4BB-3194074132F5}" type="datetime1">
               <a:rPr lang="ko-KR" altLang="en-US" smtClean="0"/>
-              <a:t>2024-05-16</a:t>
+              <a:t>2024-11-17</a:t>
             </a:fld>
             <a:endParaRPr lang="ko-KR" altLang="en-US"/>
           </a:p>
@@ -11590,7 +11678,7 @@
           <a:p>
             <a:fld id="{9450A541-7613-44B4-B513-FCD596176F9F}" type="datetime1">
               <a:rPr lang="ko-KR" altLang="en-US" smtClean="0"/>
-              <a:t>2024-05-16</a:t>
+              <a:t>2024-11-17</a:t>
             </a:fld>
             <a:endParaRPr lang="ko-KR" altLang="en-US"/>
           </a:p>
@@ -12041,7 +12129,7 @@
           <a:p>
             <a:fld id="{41BE54F0-E21D-4792-A98D-B7ACEB0EFA6C}" type="datetime1">
               <a:rPr lang="ko-KR" altLang="en-US" smtClean="0"/>
-              <a:t>2024-05-16</a:t>
+              <a:t>2024-11-17</a:t>
             </a:fld>
             <a:endParaRPr lang="ko-KR" altLang="en-US"/>
           </a:p>
@@ -12318,7 +12406,7 @@
           <a:p>
             <a:fld id="{8143C937-8F0D-4DAD-A6A4-A8429524E696}" type="datetime1">
               <a:rPr lang="ko-KR" altLang="en-US" smtClean="0"/>
-              <a:t>2024-05-16</a:t>
+              <a:t>2024-11-17</a:t>
             </a:fld>
             <a:endParaRPr lang="ko-KR" altLang="en-US"/>
           </a:p>
@@ -12495,7 +12583,7 @@
           <a:p>
             <a:fld id="{1669A256-BEB0-4A39-999F-E0158C3C0E74}" type="datetime6">
               <a:rPr lang="ko-KR" altLang="en-US" smtClean="0"/>
-              <a:t>2024년 5월</a:t>
+              <a:t>2024년 11월</a:t>
             </a:fld>
             <a:endParaRPr lang="ko-KR" altLang="en-US"/>
           </a:p>
@@ -12814,7 +12902,7 @@
           <a:p>
             <a:fld id="{1669A256-BEB0-4A39-999F-E0158C3C0E74}" type="datetime6">
               <a:rPr lang="ko-KR" altLang="en-US" smtClean="0"/>
-              <a:t>2024년 5월</a:t>
+              <a:t>2024년 11월</a:t>
             </a:fld>
             <a:endParaRPr lang="ko-KR" altLang="en-US"/>
           </a:p>
@@ -13035,7 +13123,7 @@
           <a:p>
             <a:fld id="{E10E8A8E-4312-471C-9717-F71E32010857}" type="datetime6">
               <a:rPr lang="ko-KR" altLang="en-US" smtClean="0"/>
-              <a:t>2024년 5월</a:t>
+              <a:t>2024년 11월</a:t>
             </a:fld>
             <a:endParaRPr lang="ko-KR" altLang="en-US" dirty="0"/>
           </a:p>
@@ -13579,7 +13667,7 @@
           <a:p>
             <a:fld id="{BC7BC24C-673B-40D3-9753-EEA1C8CCD9D4}" type="datetime6">
               <a:rPr lang="ko-KR" altLang="en-US" smtClean="0"/>
-              <a:t>2024년 5월</a:t>
+              <a:t>2024년 11월</a:t>
             </a:fld>
             <a:endParaRPr lang="ko-KR" altLang="en-US"/>
           </a:p>
@@ -14219,7 +14307,7 @@
           <a:p>
             <a:fld id="{A1C37B7F-F527-42BC-BFBF-2A1C33BFA621}" type="datetime6">
               <a:rPr lang="ko-KR" altLang="en-US" smtClean="0"/>
-              <a:t>2024년 5월</a:t>
+              <a:t>2024년 11월</a:t>
             </a:fld>
             <a:endParaRPr lang="ko-KR" altLang="en-US"/>
           </a:p>
@@ -14949,7 +15037,7 @@
           <a:p>
             <a:fld id="{739FA044-78D0-41E6-8971-9762389E4B2F}" type="datetime6">
               <a:rPr lang="ko-KR" altLang="en-US" smtClean="0"/>
-              <a:t>2024년 5월</a:t>
+              <a:t>2024년 11월</a:t>
             </a:fld>
             <a:endParaRPr lang="ko-KR" altLang="en-US"/>
           </a:p>
@@ -15128,7 +15216,7 @@
           <a:p>
             <a:fld id="{0E19CB95-6D28-40F1-9DA3-1BAC5D4B5B4F}" type="datetime6">
               <a:rPr lang="ko-KR" altLang="en-US" smtClean="0"/>
-              <a:t>2024년 5월</a:t>
+              <a:t>2024년 11월</a:t>
             </a:fld>
             <a:endParaRPr lang="ko-KR" altLang="en-US"/>
           </a:p>
@@ -15227,7 +15315,7 @@
           <a:p>
             <a:fld id="{0E19CB95-6D28-40F1-9DA3-1BAC5D4B5B4F}" type="datetime6">
               <a:rPr lang="ko-KR" altLang="en-US" smtClean="0"/>
-              <a:t>2024년 5월</a:t>
+              <a:t>2024년 11월</a:t>
             </a:fld>
             <a:endParaRPr lang="ko-KR" altLang="en-US"/>
           </a:p>
@@ -15455,7 +15543,7 @@
           <a:p>
             <a:fld id="{A3CDDCA9-35C0-4597-9D50-920FF7E22C98}" type="datetime6">
               <a:rPr lang="ko-KR" altLang="en-US" smtClean="0"/>
-              <a:t>2024년 5월</a:t>
+              <a:t>2024년 11월</a:t>
             </a:fld>
             <a:endParaRPr lang="ko-KR" altLang="en-US"/>
           </a:p>
@@ -15552,7 +15640,7 @@
         </p:spPr>
         <p:txBody>
           <a:bodyPr vert="horz" lIns="91440" tIns="45720" rIns="91440" bIns="45720" rtlCol="0">
-            <a:normAutofit lnSpcReduction="10000"/>
+            <a:normAutofit fontScale="92500" lnSpcReduction="20000"/>
           </a:bodyPr>
           <a:lstStyle>
             <a:lvl1pPr marL="228600" indent="-228600" algn="l" defTabSz="914400" rtl="0" eaLnBrk="1" latinLnBrk="1" hangingPunct="1">
@@ -16066,7 +16154,7 @@
           <a:p>
             <a:fld id="{BE92A0B0-3066-4F8E-9BAC-0ECCBF49FC15}" type="datetime1">
               <a:rPr lang="ko-KR" altLang="en-US" smtClean="0"/>
-              <a:t>2024-05-16</a:t>
+              <a:t>2024-11-17</a:t>
             </a:fld>
             <a:endParaRPr lang="ko-KR" altLang="en-US"/>
           </a:p>
@@ -16276,7 +16364,7 @@
           <a:p>
             <a:fld id="{351429AF-CDF6-414F-9A6D-850B604A3A93}" type="datetime1">
               <a:rPr lang="ko-KR" altLang="en-US" smtClean="0"/>
-              <a:t>2024-05-16</a:t>
+              <a:t>2024-11-17</a:t>
             </a:fld>
             <a:endParaRPr lang="ko-KR" altLang="en-US"/>
           </a:p>
@@ -16483,7 +16571,7 @@
           <a:p>
             <a:fld id="{98BD38DC-8B64-47A0-A830-1FF09837E62A}" type="datetime1">
               <a:rPr lang="ko-KR" altLang="en-US" smtClean="0"/>
-              <a:t>2024-05-16</a:t>
+              <a:t>2024-11-17</a:t>
             </a:fld>
             <a:endParaRPr lang="ko-KR" altLang="en-US"/>
           </a:p>
@@ -16703,7 +16791,7 @@
           <a:p>
             <a:fld id="{25459FD3-5012-417D-9896-27B045C7CD66}" type="datetime1">
               <a:rPr lang="ko-KR" altLang="en-US" smtClean="0"/>
-              <a:t>2024-05-16</a:t>
+              <a:t>2024-11-17</a:t>
             </a:fld>
             <a:endParaRPr lang="ko-KR" altLang="en-US"/>
           </a:p>
@@ -16882,8 +16970,8 @@
         </p:blipFill>
         <p:spPr>
           <a:xfrm>
-            <a:off x="6375400" y="2690515"/>
-            <a:ext cx="5489855" cy="3486448"/>
+            <a:off x="6543055" y="2796987"/>
+            <a:ext cx="5322200" cy="3379975"/>
           </a:xfrm>
           <a:prstGeom prst="rect">
             <a:avLst/>
@@ -16974,7 +17062,7 @@
           <a:p>
             <a:fld id="{A0FA322A-BD16-43DC-94B3-F4988EF931AF}" type="datetime1">
               <a:rPr lang="ko-KR" altLang="en-US" smtClean="0"/>
-              <a:t>2024-05-16</a:t>
+              <a:t>2024-11-17</a:t>
             </a:fld>
             <a:endParaRPr lang="ko-KR" altLang="en-US"/>
           </a:p>
@@ -17141,7 +17229,7 @@
           <a:p>
             <a:fld id="{0476D48C-8DCB-41F1-ABBC-B8FF679AC18D}" type="datetime1">
               <a:rPr lang="ko-KR" altLang="en-US" smtClean="0"/>
-              <a:t>2024-05-16</a:t>
+              <a:t>2024-11-17</a:t>
             </a:fld>
             <a:endParaRPr lang="ko-KR" altLang="en-US"/>
           </a:p>
@@ -17507,7 +17595,7 @@
           <a:p>
             <a:fld id="{A6408BAE-7F50-4B88-B7A1-F6A865A29A4B}" type="datetime1">
               <a:rPr lang="ko-KR" altLang="en-US" smtClean="0"/>
-              <a:t>2024-05-16</a:t>
+              <a:t>2024-11-17</a:t>
             </a:fld>
             <a:endParaRPr lang="ko-KR" altLang="en-US"/>
           </a:p>
@@ -18014,7 +18102,7 @@
           <a:p>
             <a:fld id="{3C9CE3CE-253F-4F9D-BA15-C226C8D8501E}" type="datetime6">
               <a:rPr lang="ko-KR" altLang="en-US" smtClean="0"/>
-              <a:t>2024년 5월</a:t>
+              <a:t>2024년 11월</a:t>
             </a:fld>
             <a:endParaRPr lang="ko-KR" altLang="en-US"/>
           </a:p>
@@ -18349,7 +18437,7 @@
           <a:p>
             <a:fld id="{6ABF8140-662B-4C70-8D54-95183800525F}" type="datetime6">
               <a:rPr lang="ko-KR" altLang="en-US" smtClean="0"/>
-              <a:t>2024년 5월</a:t>
+              <a:t>2024년 11월</a:t>
             </a:fld>
             <a:endParaRPr lang="ko-KR" altLang="en-US"/>
           </a:p>
@@ -18611,7 +18699,7 @@
           <a:p>
             <a:fld id="{C4D18CED-2597-4667-A518-B6308FA44F17}" type="datetime1">
               <a:rPr lang="ko-KR" altLang="en-US" smtClean="0"/>
-              <a:t>2024-05-16</a:t>
+              <a:t>2024-11-17</a:t>
             </a:fld>
             <a:endParaRPr lang="ko-KR" altLang="en-US"/>
           </a:p>
@@ -18899,7 +18987,7 @@
           <a:p>
             <a:fld id="{1A385C8E-84F8-4DED-A0D7-2C67F0F12C0A}" type="datetime1">
               <a:rPr lang="ko-KR" altLang="en-US" smtClean="0"/>
-              <a:t>2024-05-16</a:t>
+              <a:t>2024-11-17</a:t>
             </a:fld>
             <a:endParaRPr lang="ko-KR" altLang="en-US"/>
           </a:p>
@@ -19167,7 +19255,7 @@
           <a:p>
             <a:fld id="{0F78D9C4-20C1-4B15-A116-16DC77AD9A1E}" type="datetime1">
               <a:rPr lang="ko-KR" altLang="en-US" smtClean="0"/>
-              <a:t>2024-05-16</a:t>
+              <a:t>2024-11-17</a:t>
             </a:fld>
             <a:endParaRPr lang="ko-KR" altLang="en-US"/>
           </a:p>
@@ -19314,7 +19402,7 @@
           <a:p>
             <a:fld id="{0E19CB95-6D28-40F1-9DA3-1BAC5D4B5B4F}" type="datetime6">
               <a:rPr lang="ko-KR" altLang="en-US" smtClean="0"/>
-              <a:t>2024년 5월</a:t>
+              <a:t>2024년 11월</a:t>
             </a:fld>
             <a:endParaRPr lang="ko-KR" altLang="en-US"/>
           </a:p>
@@ -19361,6 +19449,10 @@
             <a:r>
               <a:rPr lang="ko-KR" altLang="en-US" sz="7200" dirty="0"/>
               <a:t>사용자 입력</a:t>
+            </a:r>
+            <a:r>
+              <a:rPr lang="en-US" altLang="ko-KR" sz="7200" dirty="0"/>
+              <a:t/>
             </a:r>
             <a:br>
               <a:rPr lang="en-US" altLang="ko-KR" sz="7200" dirty="0"/>
@@ -19565,7 +19657,7 @@
           <a:p>
             <a:fld id="{CD59933F-0537-40E7-B48D-B5C53C90AF6F}" type="datetime1">
               <a:rPr lang="ko-KR" altLang="en-US" smtClean="0"/>
-              <a:t>2024-05-16</a:t>
+              <a:t>2024-11-17</a:t>
             </a:fld>
             <a:endParaRPr lang="ko-KR" altLang="en-US"/>
           </a:p>
@@ -19725,7 +19817,7 @@
           <a:p>
             <a:fld id="{A39B24CD-2281-47EB-83C5-6799704FD369}" type="datetime1">
               <a:rPr lang="ko-KR" altLang="en-US" smtClean="0"/>
-              <a:t>2024-05-16</a:t>
+              <a:t>2024-11-17</a:t>
             </a:fld>
             <a:endParaRPr lang="ko-KR" altLang="en-US"/>
           </a:p>
@@ -19915,7 +20007,7 @@
           <a:p>
             <a:fld id="{90F4BD02-BEFC-43DA-BA86-BED505C5AF55}" type="datetime1">
               <a:rPr lang="ko-KR" altLang="en-US" smtClean="0"/>
-              <a:t>2024-05-16</a:t>
+              <a:t>2024-11-17</a:t>
             </a:fld>
             <a:endParaRPr lang="ko-KR" altLang="en-US"/>
           </a:p>
@@ -20079,7 +20171,7 @@
           <a:p>
             <a:fld id="{892FD069-7B29-400B-B981-595818B69B15}" type="datetime1">
               <a:rPr lang="ko-KR" altLang="en-US" smtClean="0"/>
-              <a:t>2024-05-16</a:t>
+              <a:t>2024-11-17</a:t>
             </a:fld>
             <a:endParaRPr lang="ko-KR" altLang="en-US"/>
           </a:p>
@@ -20191,7 +20283,12 @@
             <p:ph idx="1"/>
           </p:nvPr>
         </p:nvSpPr>
-        <p:spPr/>
+        <p:spPr>
+          <a:xfrm>
+            <a:off x="838200" y="1825625"/>
+            <a:ext cx="10737028" cy="4351338"/>
+          </a:xfrm>
+        </p:spPr>
         <p:txBody>
           <a:bodyPr/>
           <a:lstStyle/>
@@ -20308,7 +20405,7 @@
           <a:p>
             <a:fld id="{B6DE8D43-5FBB-4E05-B937-AB6CE5001749}" type="datetime1">
               <a:rPr lang="ko-KR" altLang="en-US" smtClean="0"/>
-              <a:t>2024-05-16</a:t>
+              <a:t>2024-11-17</a:t>
             </a:fld>
             <a:endParaRPr lang="ko-KR" altLang="en-US"/>
           </a:p>
@@ -20420,7 +20517,12 @@
             <p:ph idx="1"/>
           </p:nvPr>
         </p:nvSpPr>
-        <p:spPr/>
+        <p:spPr>
+          <a:xfrm>
+            <a:off x="838199" y="1825625"/>
+            <a:ext cx="10844605" cy="4351338"/>
+          </a:xfrm>
+        </p:spPr>
         <p:txBody>
           <a:bodyPr/>
           <a:lstStyle/>
@@ -20565,7 +20667,7 @@
           <a:p>
             <a:fld id="{DE33AB3D-ED5C-49D6-9C89-3645790B91E0}" type="datetime1">
               <a:rPr lang="ko-KR" altLang="en-US" smtClean="0"/>
-              <a:t>2024-05-16</a:t>
+              <a:t>2024-11-17</a:t>
             </a:fld>
             <a:endParaRPr lang="ko-KR" altLang="en-US"/>
           </a:p>
@@ -20720,7 +20822,7 @@
           <a:p>
             <a:fld id="{E6847929-DE41-4EFD-B9A3-21C9B8736D52}" type="datetime6">
               <a:rPr lang="ko-KR" altLang="en-US" smtClean="0"/>
-              <a:t>2024년 5월</a:t>
+              <a:t>2024년 11월</a:t>
             </a:fld>
             <a:endParaRPr lang="ko-KR" altLang="en-US"/>
           </a:p>
@@ -20818,6 +20920,10 @@
             <a:r>
               <a:rPr lang="ko-KR" altLang="en-US" sz="4800" dirty="0"/>
               <a:t>형용사 </a:t>
+            </a:r>
+            <a:r>
+              <a:rPr lang="en-US" altLang="ko-KR" sz="4800" dirty="0"/>
+              <a:t/>
             </a:r>
             <a:br>
               <a:rPr lang="en-US" altLang="ko-KR" sz="4800" dirty="0"/>
@@ -21127,7 +21233,7 @@
           <a:p>
             <a:fld id="{034852E9-5473-496C-B8E6-F7D738D9B5F2}" type="datetime1">
               <a:rPr lang="ko-KR" altLang="en-US" smtClean="0"/>
-              <a:t>2024-05-16</a:t>
+              <a:t>2024-11-17</a:t>
             </a:fld>
             <a:endParaRPr lang="ko-KR" altLang="en-US" dirty="0"/>
           </a:p>
@@ -21435,7 +21541,7 @@
           <a:p>
             <a:fld id="{74B74413-D8B3-44FE-9460-DC12566AE16A}" type="datetime1">
               <a:rPr lang="ko-KR" altLang="en-US" smtClean="0"/>
-              <a:t>2024-05-16</a:t>
+              <a:t>2024-11-17</a:t>
             </a:fld>
             <a:endParaRPr lang="ko-KR" altLang="en-US"/>
           </a:p>
@@ -21971,7 +22077,7 @@
           <a:p>
             <a:fld id="{3C9CE3CE-253F-4F9D-BA15-C226C8D8501E}" type="datetime6">
               <a:rPr lang="ko-KR" altLang="en-US" smtClean="0"/>
-              <a:t>2024년 5월</a:t>
+              <a:t>2024년 11월</a:t>
             </a:fld>
             <a:endParaRPr lang="ko-KR" altLang="en-US"/>
           </a:p>
@@ -22304,7 +22410,7 @@
           <a:p>
             <a:fld id="{0E19CB95-6D28-40F1-9DA3-1BAC5D4B5B4F}" type="datetime6">
               <a:rPr lang="ko-KR" altLang="en-US" smtClean="0"/>
-              <a:t>2024년 5월</a:t>
+              <a:t>2024년 11월</a:t>
             </a:fld>
             <a:endParaRPr lang="ko-KR" altLang="en-US"/>
           </a:p>
@@ -22607,7 +22713,7 @@
           <a:p>
             <a:fld id="{F6093437-8AFD-4903-BC6B-CF849953625C}" type="datetime1">
               <a:rPr lang="ko-KR" altLang="en-US" smtClean="0"/>
-              <a:t>2024-05-16</a:t>
+              <a:t>2024-11-17</a:t>
             </a:fld>
             <a:endParaRPr lang="ko-KR" altLang="en-US"/>
           </a:p>
@@ -22734,7 +22840,7 @@
           <a:p>
             <a:fld id="{0F78D9C4-20C1-4B15-A116-16DC77AD9A1E}" type="datetime1">
               <a:rPr lang="ko-KR" altLang="en-US" smtClean="0"/>
-              <a:t>2024-05-16</a:t>
+              <a:t>2024-11-17</a:t>
             </a:fld>
             <a:endParaRPr lang="ko-KR" altLang="en-US"/>
           </a:p>
@@ -22893,7 +22999,7 @@
         </p:spPr>
         <p:txBody>
           <a:bodyPr>
-            <a:normAutofit/>
+            <a:normAutofit lnSpcReduction="10000"/>
           </a:bodyPr>
           <a:lstStyle/>
           <a:p>
@@ -22976,7 +23082,7 @@
           <a:p>
             <a:fld id="{0F78D9C4-20C1-4B15-A116-16DC77AD9A1E}" type="datetime1">
               <a:rPr lang="ko-KR" altLang="en-US" smtClean="0"/>
-              <a:t>2024-05-16</a:t>
+              <a:t>2024-11-17</a:t>
             </a:fld>
             <a:endParaRPr lang="ko-KR" altLang="en-US"/>
           </a:p>
@@ -23355,7 +23461,7 @@
           <a:p>
             <a:fld id="{0D069756-708A-42B2-ADAC-5037042AC683}" type="datetime1">
               <a:rPr lang="ko-KR" altLang="en-US" smtClean="0"/>
-              <a:t>2024-05-16</a:t>
+              <a:t>2024-11-17</a:t>
             </a:fld>
             <a:endParaRPr lang="ko-KR" altLang="en-US"/>
           </a:p>
@@ -23544,7 +23650,7 @@
           <a:p>
             <a:fld id="{DAC7A4FF-ED46-4427-A5F3-196455109A92}" type="datetime1">
               <a:rPr lang="ko-KR" altLang="en-US" smtClean="0"/>
-              <a:t>2024-05-16</a:t>
+              <a:t>2024-11-17</a:t>
             </a:fld>
             <a:endParaRPr lang="ko-KR" altLang="en-US"/>
           </a:p>
@@ -24059,7 +24165,7 @@
           <a:p>
             <a:fld id="{3C9CE3CE-253F-4F9D-BA15-C226C8D8501E}" type="datetime6">
               <a:rPr lang="ko-KR" altLang="en-US" smtClean="0"/>
-              <a:t>2024년 5월</a:t>
+              <a:t>2024년 11월</a:t>
             </a:fld>
             <a:endParaRPr lang="ko-KR" altLang="en-US"/>
           </a:p>
@@ -24461,7 +24567,7 @@
           <a:p>
             <a:fld id="{0F78D9C4-20C1-4B15-A116-16DC77AD9A1E}" type="datetime1">
               <a:rPr lang="ko-KR" altLang="en-US" smtClean="0"/>
-              <a:t>2024-05-16</a:t>
+              <a:t>2024-11-17</a:t>
             </a:fld>
             <a:endParaRPr lang="ko-KR" altLang="en-US"/>
           </a:p>
@@ -24593,7 +24699,7 @@
         </p:spPr>
         <p:txBody>
           <a:bodyPr vert="horz" lIns="91440" tIns="45720" rIns="91440" bIns="45720" rtlCol="0">
-            <a:normAutofit/>
+            <a:normAutofit fontScale="92500"/>
           </a:bodyPr>
           <a:lstStyle>
             <a:lvl1pPr marL="228600" indent="-228600" algn="l" defTabSz="914400" rtl="0" eaLnBrk="1" latinLnBrk="1" hangingPunct="1">
@@ -25227,7 +25333,7 @@
           <a:p>
             <a:fld id="{3C9CE3CE-253F-4F9D-BA15-C226C8D8501E}" type="datetime6">
               <a:rPr lang="ko-KR" altLang="en-US" smtClean="0"/>
-              <a:t>2024년 5월</a:t>
+              <a:t>2024년 11월</a:t>
             </a:fld>
             <a:endParaRPr lang="ko-KR" altLang="en-US"/>
           </a:p>
@@ -25624,7 +25730,7 @@
           <a:p>
             <a:fld id="{3C9CE3CE-253F-4F9D-BA15-C226C8D8501E}" type="datetime6">
               <a:rPr lang="ko-KR" altLang="en-US" smtClean="0"/>
-              <a:t>2024년 5월</a:t>
+              <a:t>2024년 11월</a:t>
             </a:fld>
             <a:endParaRPr lang="ko-KR" altLang="en-US"/>
           </a:p>
@@ -25865,7 +25971,7 @@
           <a:p>
             <a:fld id="{3C9CE3CE-253F-4F9D-BA15-C226C8D8501E}" type="datetime6">
               <a:rPr lang="ko-KR" altLang="en-US" smtClean="0"/>
-              <a:t>2024년 5월</a:t>
+              <a:t>2024년 11월</a:t>
             </a:fld>
             <a:endParaRPr lang="ko-KR" altLang="en-US"/>
           </a:p>
@@ -26040,7 +26146,7 @@
           <a:p>
             <a:fld id="{0E19CB95-6D28-40F1-9DA3-1BAC5D4B5B4F}" type="datetime6">
               <a:rPr lang="ko-KR" altLang="en-US" smtClean="0"/>
-              <a:t>2024년 5월</a:t>
+              <a:t>2024년 11월</a:t>
             </a:fld>
             <a:endParaRPr lang="ko-KR" altLang="en-US"/>
           </a:p>
@@ -26145,7 +26251,7 @@
           <a:p>
             <a:fld id="{0F78D9C4-20C1-4B15-A116-16DC77AD9A1E}" type="datetime1">
               <a:rPr lang="ko-KR" altLang="en-US" smtClean="0"/>
-              <a:t>2024-05-16</a:t>
+              <a:t>2024-11-17</a:t>
             </a:fld>
             <a:endParaRPr lang="ko-KR" altLang="en-US"/>
           </a:p>
@@ -26304,7 +26410,7 @@
           <a:p>
             <a:fld id="{0F78D9C4-20C1-4B15-A116-16DC77AD9A1E}" type="datetime1">
               <a:rPr lang="ko-KR" altLang="en-US" smtClean="0"/>
-              <a:t>2024-05-16</a:t>
+              <a:t>2024-11-17</a:t>
             </a:fld>
             <a:endParaRPr lang="ko-KR" altLang="en-US"/>
           </a:p>
@@ -26687,7 +26793,7 @@
           <a:p>
             <a:fld id="{A259DC52-61D3-4C27-AF0E-1DB4269CFA5E}" type="datetime6">
               <a:rPr lang="ko-KR" altLang="en-US" smtClean="0"/>
-              <a:t>2024년 5월</a:t>
+              <a:t>2024년 11월</a:t>
             </a:fld>
             <a:endParaRPr lang="ko-KR" altLang="en-US"/>
           </a:p>
@@ -26785,7 +26891,7 @@
         </p:spPr>
         <p:txBody>
           <a:bodyPr vert="horz" lIns="91440" tIns="45720" rIns="91440" bIns="45720" rtlCol="0">
-            <a:normAutofit fontScale="85000" lnSpcReduction="20000"/>
+            <a:normAutofit fontScale="77500" lnSpcReduction="20000"/>
           </a:bodyPr>
           <a:lstStyle>
             <a:lvl1pPr marL="228600" indent="-228600" algn="l" defTabSz="914400" rtl="0" eaLnBrk="1" latinLnBrk="1" hangingPunct="1">
@@ -26992,7 +27098,7 @@
         </p:spPr>
         <p:txBody>
           <a:bodyPr vert="horz" lIns="91440" tIns="45720" rIns="91440" bIns="45720" rtlCol="0">
-            <a:normAutofit fontScale="85000" lnSpcReduction="20000"/>
+            <a:normAutofit fontScale="77500" lnSpcReduction="20000"/>
           </a:bodyPr>
           <a:lstStyle>
             <a:lvl1pPr marL="228600" indent="-228600" algn="l" defTabSz="914400" rtl="0" eaLnBrk="1" latinLnBrk="1" hangingPunct="1">
@@ -27199,7 +27305,7 @@
         </p:spPr>
         <p:txBody>
           <a:bodyPr vert="horz" lIns="91440" tIns="45720" rIns="91440" bIns="45720" rtlCol="0">
-            <a:normAutofit fontScale="85000" lnSpcReduction="20000"/>
+            <a:normAutofit fontScale="77500" lnSpcReduction="20000"/>
           </a:bodyPr>
           <a:lstStyle>
             <a:lvl1pPr marL="228600" indent="-228600" algn="l" defTabSz="914400" rtl="0" eaLnBrk="1" latinLnBrk="1" hangingPunct="1">
@@ -27406,7 +27512,7 @@
         </p:spPr>
         <p:txBody>
           <a:bodyPr vert="horz" lIns="91440" tIns="45720" rIns="91440" bIns="45720" rtlCol="0">
-            <a:normAutofit fontScale="85000" lnSpcReduction="20000"/>
+            <a:normAutofit fontScale="77500" lnSpcReduction="20000"/>
           </a:bodyPr>
           <a:lstStyle>
             <a:lvl1pPr marL="228600" indent="-228600" algn="l" defTabSz="914400" rtl="0" eaLnBrk="1" latinLnBrk="1" hangingPunct="1">
@@ -27613,7 +27719,7 @@
         </p:spPr>
         <p:txBody>
           <a:bodyPr vert="horz" lIns="91440" tIns="45720" rIns="91440" bIns="45720" rtlCol="0">
-            <a:normAutofit fontScale="85000" lnSpcReduction="20000"/>
+            <a:normAutofit fontScale="77500" lnSpcReduction="20000"/>
           </a:bodyPr>
           <a:lstStyle>
             <a:lvl1pPr marL="228600" indent="-228600" algn="l" defTabSz="914400" rtl="0" eaLnBrk="1" latinLnBrk="1" hangingPunct="1">
@@ -27820,7 +27926,7 @@
         </p:spPr>
         <p:txBody>
           <a:bodyPr vert="horz" lIns="91440" tIns="45720" rIns="91440" bIns="45720" rtlCol="0">
-            <a:normAutofit fontScale="85000" lnSpcReduction="20000"/>
+            <a:normAutofit fontScale="77500" lnSpcReduction="20000"/>
           </a:bodyPr>
           <a:lstStyle>
             <a:lvl1pPr marL="228600" indent="-228600" algn="l" defTabSz="914400" rtl="0" eaLnBrk="1" latinLnBrk="1" hangingPunct="1">
@@ -28027,7 +28133,7 @@
         </p:spPr>
         <p:txBody>
           <a:bodyPr vert="horz" lIns="91440" tIns="45720" rIns="91440" bIns="45720" rtlCol="0">
-            <a:normAutofit fontScale="85000" lnSpcReduction="20000"/>
+            <a:normAutofit fontScale="77500" lnSpcReduction="20000"/>
           </a:bodyPr>
           <a:lstStyle>
             <a:lvl1pPr marL="228600" indent="-228600" algn="l" defTabSz="914400" rtl="0" eaLnBrk="1" latinLnBrk="1" hangingPunct="1">
@@ -28234,7 +28340,7 @@
         </p:spPr>
         <p:txBody>
           <a:bodyPr vert="horz" lIns="91440" tIns="45720" rIns="91440" bIns="45720" rtlCol="0">
-            <a:normAutofit fontScale="77500" lnSpcReduction="20000"/>
+            <a:normAutofit fontScale="62500" lnSpcReduction="20000"/>
           </a:bodyPr>
           <a:lstStyle>
             <a:lvl1pPr marL="228600" indent="-228600" algn="l" defTabSz="914400" rtl="0" eaLnBrk="1" latinLnBrk="1" hangingPunct="1">
@@ -28506,7 +28612,7 @@
           <a:p>
             <a:fld id="{A259DC52-61D3-4C27-AF0E-1DB4269CFA5E}" type="datetime6">
               <a:rPr lang="ko-KR" altLang="en-US" smtClean="0"/>
-              <a:t>2024년 5월</a:t>
+              <a:t>2024년 11월</a:t>
             </a:fld>
             <a:endParaRPr lang="ko-KR" altLang="en-US"/>
           </a:p>
@@ -28908,7 +29014,7 @@
           <a:p>
             <a:fld id="{A259DC52-61D3-4C27-AF0E-1DB4269CFA5E}" type="datetime6">
               <a:rPr lang="ko-KR" altLang="en-US" smtClean="0"/>
-              <a:t>2024년 5월</a:t>
+              <a:t>2024년 11월</a:t>
             </a:fld>
             <a:endParaRPr lang="ko-KR" altLang="en-US"/>
           </a:p>
@@ -29552,7 +29658,7 @@
           <a:p>
             <a:fld id="{A259DC52-61D3-4C27-AF0E-1DB4269CFA5E}" type="datetime6">
               <a:rPr lang="ko-KR" altLang="en-US" smtClean="0"/>
-              <a:t>2024년 5월</a:t>
+              <a:t>2024년 11월</a:t>
             </a:fld>
             <a:endParaRPr lang="ko-KR" altLang="en-US"/>
           </a:p>
@@ -29867,6 +29973,10 @@
             <a:r>
               <a:rPr lang="ko-KR" altLang="en-US" sz="2400" b="1" dirty="0"/>
               <a:t> </a:t>
+            </a:r>
+            <a:r>
+              <a:rPr lang="en-US" altLang="ko-KR" sz="2400" dirty="0"/>
+              <a:t/>
             </a:r>
             <a:br>
               <a:rPr lang="en-US" altLang="ko-KR" sz="2400" dirty="0"/>
@@ -30007,7 +30117,7 @@
           <a:p>
             <a:fld id="{0F78D9C4-20C1-4B15-A116-16DC77AD9A1E}" type="datetime1">
               <a:rPr lang="ko-KR" altLang="en-US" smtClean="0"/>
-              <a:t>2024-05-16</a:t>
+              <a:t>2024-11-17</a:t>
             </a:fld>
             <a:endParaRPr lang="ko-KR" altLang="en-US"/>
           </a:p>
@@ -30067,7 +30177,7 @@
         </p:spPr>
         <p:txBody>
           <a:bodyPr vert="horz" lIns="91440" tIns="45720" rIns="91440" bIns="45720" rtlCol="0">
-            <a:normAutofit fontScale="92500"/>
+            <a:normAutofit fontScale="92500" lnSpcReduction="20000"/>
           </a:bodyPr>
           <a:lstStyle>
             <a:lvl1pPr marL="228600" indent="-228600" algn="l" defTabSz="914400" rtl="0" eaLnBrk="1" latinLnBrk="1" hangingPunct="1">
@@ -30542,7 +30652,7 @@
           <a:p>
             <a:fld id="{A259DC52-61D3-4C27-AF0E-1DB4269CFA5E}" type="datetime6">
               <a:rPr lang="ko-KR" altLang="en-US" smtClean="0"/>
-              <a:t>2024년 5월</a:t>
+              <a:t>2024년 11월</a:t>
             </a:fld>
             <a:endParaRPr lang="ko-KR" altLang="en-US"/>
           </a:p>
@@ -30857,6 +30967,10 @@
             <a:r>
               <a:rPr lang="ko-KR" altLang="en-US" sz="2400" b="1" dirty="0"/>
               <a:t> </a:t>
+            </a:r>
+            <a:r>
+              <a:rPr lang="en-US" altLang="ko-KR" sz="2400" dirty="0"/>
+              <a:t/>
             </a:r>
             <a:br>
               <a:rPr lang="en-US" altLang="ko-KR" sz="2400" dirty="0"/>
@@ -30954,7 +31068,7 @@
           <a:p>
             <a:fld id="{A259DC52-61D3-4C27-AF0E-1DB4269CFA5E}" type="datetime6">
               <a:rPr lang="ko-KR" altLang="en-US" smtClean="0"/>
-              <a:t>2024년 5월</a:t>
+              <a:t>2024년 11월</a:t>
             </a:fld>
             <a:endParaRPr lang="ko-KR" altLang="en-US"/>
           </a:p>
@@ -31269,6 +31383,10 @@
             <a:r>
               <a:rPr lang="ko-KR" altLang="en-US" sz="2400" b="1" dirty="0"/>
               <a:t> </a:t>
+            </a:r>
+            <a:r>
+              <a:rPr lang="en-US" altLang="ko-KR" sz="2400" dirty="0"/>
+              <a:t/>
             </a:r>
             <a:br>
               <a:rPr lang="en-US" altLang="ko-KR" sz="2400" dirty="0"/>
@@ -31350,7 +31468,7 @@
           <a:p>
             <a:fld id="{A259DC52-61D3-4C27-AF0E-1DB4269CFA5E}" type="datetime6">
               <a:rPr lang="ko-KR" altLang="en-US" smtClean="0"/>
-              <a:t>2024년 5월</a:t>
+              <a:t>2024년 11월</a:t>
             </a:fld>
             <a:endParaRPr lang="ko-KR" altLang="en-US"/>
           </a:p>
@@ -31723,7 +31841,7 @@
         </p:spPr>
         <p:txBody>
           <a:bodyPr vert="horz" lIns="91440" tIns="45720" rIns="91440" bIns="45720" rtlCol="0">
-            <a:normAutofit/>
+            <a:normAutofit fontScale="92500"/>
           </a:bodyPr>
           <a:lstStyle>
             <a:lvl1pPr marL="228600" indent="-228600" algn="l" defTabSz="914400" rtl="0" eaLnBrk="1" latinLnBrk="1" hangingPunct="1">
@@ -31991,7 +32109,7 @@
         </p:spPr>
         <p:txBody>
           <a:bodyPr>
-            <a:normAutofit lnSpcReduction="10000"/>
+            <a:normAutofit fontScale="92500"/>
           </a:bodyPr>
           <a:lstStyle/>
           <a:p>
@@ -32151,7 +32269,7 @@
           <a:p>
             <a:fld id="{A259DC52-61D3-4C27-AF0E-1DB4269CFA5E}" type="datetime6">
               <a:rPr lang="ko-KR" altLang="en-US" smtClean="0"/>
-              <a:t>2024년 5월</a:t>
+              <a:t>2024년 11월</a:t>
             </a:fld>
             <a:endParaRPr lang="ko-KR" altLang="en-US"/>
           </a:p>
@@ -32289,7 +32407,7 @@
           <a:p>
             <a:fld id="{2CFBFBFA-EBC3-4288-86D0-55A69B340430}" type="datetime6">
               <a:rPr lang="ko-KR" altLang="en-US" smtClean="0"/>
-              <a:t>2024년 5월</a:t>
+              <a:t>2024년 11월</a:t>
             </a:fld>
             <a:endParaRPr lang="ko-KR" altLang="en-US"/>
           </a:p>
@@ -32478,7 +32596,7 @@
           <a:p>
             <a:fld id="{2CFBFBFA-EBC3-4288-86D0-55A69B340430}" type="datetime6">
               <a:rPr lang="ko-KR" altLang="en-US" smtClean="0"/>
-              <a:t>2024년 5월</a:t>
+              <a:t>2024년 11월</a:t>
             </a:fld>
             <a:endParaRPr lang="ko-KR" altLang="en-US"/>
           </a:p>
@@ -32548,6 +32666,14 @@
                 </a:solidFill>
               </a:rPr>
               <a:t>Markup</a:t>
+            </a:r>
+            <a:r>
+              <a:rPr lang="en-US" altLang="ko-KR" sz="3600" dirty="0">
+                <a:solidFill>
+                  <a:srgbClr val="F9A130"/>
+                </a:solidFill>
+              </a:rPr>
+              <a:t/>
             </a:r>
             <a:br>
               <a:rPr lang="en-US" altLang="ko-KR" sz="3600" dirty="0">
@@ -32895,7 +33021,7 @@
           <a:p>
             <a:fld id="{D6D095D9-1944-4F99-AAE6-350D623C222B}" type="datetime1">
               <a:rPr lang="ko-KR" altLang="en-US" smtClean="0"/>
-              <a:t>2024-05-16</a:t>
+              <a:t>2024-11-17</a:t>
             </a:fld>
             <a:endParaRPr lang="ko-KR" altLang="en-US"/>
           </a:p>
